--- a/生物化学实验(Biochemistry Lab)/开放实验/准备工作/实验讨论.pptx
+++ b/生物化学实验(Biochemistry Lab)/开放实验/准备工作/实验讨论.pptx
@@ -1472,11 +1472,11 @@
               <a:defRPr/>
             </a:pPr>
             <a:r>
-              <a:rPr kumimoji="1" lang="zh-CN" altLang="en-US"/>
+              <a:rPr kumimoji="1" lang="zh-CN" altLang="en-US" dirty="0"/>
               <a:t>胆固醇在体内大多与长链脂肪酸结合形成</a:t>
             </a:r>
             <a:r>
-              <a:rPr lang="zh-CN" altLang="en-US">
+              <a:rPr lang="zh-CN" altLang="en-US" dirty="0">
                 <a:solidFill>
                   <a:srgbClr val="FF0000"/>
                 </a:solidFill>
